--- a/Devops10.pptx
+++ b/Devops10.pptx
@@ -5703,7 +5703,7 @@
         <p:spPr>
           <a:xfrm>
             <a:off x="652410" y="4190261"/>
-            <a:ext cx="5157626" cy="1630045"/>
+            <a:ext cx="5157626" cy="1322070"/>
           </a:xfrm>
           <a:prstGeom prst="rect">
             <a:avLst/>
@@ -5729,7 +5729,7 @@
           <a:p>
             <a:r>
               <a:rPr lang="en-IN" sz="2000" dirty="0"/>
-              <a:t>2251053  Avirup Das</a:t>
+              <a:t>2251187  Ankita Nath</a:t>
             </a:r>
             <a:endParaRPr lang="en-IN" sz="2000" dirty="0"/>
           </a:p>
@@ -5741,48 +5741,7 @@
             <a:endParaRPr lang="en-IN" sz="2000" dirty="0"/>
           </a:p>
           <a:p>
-            <a:r>
-              <a:rPr lang="en-IN" sz="2000" dirty="0"/>
-              <a:t>2251198  Abhijit Ghosh</a:t>
-            </a:r>
             <a:endParaRPr lang="en-IN" sz="2000" dirty="0"/>
-          </a:p>
-          <a:p>
-            <a:r>
-              <a:rPr lang="en-IN" sz="2000" dirty="0"/>
-              <a:t>2251243  Rahit Saha</a:t>
-            </a:r>
-            <a:endParaRPr lang="en-IN" sz="2000" dirty="0"/>
-          </a:p>
-        </p:txBody>
-      </p:sp>
-      <p:sp>
-        <p:nvSpPr>
-          <p:cNvPr id="8" name="TextBox 7"/>
-          <p:cNvSpPr txBox="1"/>
-          <p:nvPr/>
-        </p:nvSpPr>
-        <p:spPr>
-          <a:xfrm>
-            <a:off x="662684" y="5821477"/>
-            <a:ext cx="3395608" cy="368300"/>
-          </a:xfrm>
-          <a:prstGeom prst="rect">
-            <a:avLst/>
-          </a:prstGeom>
-          <a:noFill/>
-        </p:spPr>
-        <p:txBody>
-          <a:bodyPr wrap="square" rtlCol="0">
-            <a:spAutoFit/>
-          </a:bodyPr>
-          <a:lstStyle/>
-          <a:p>
-            <a:r>
-              <a:rPr lang="en-IN" b="1" dirty="0"/>
-              <a:t>Presented On 10/03/2025</a:t>
-            </a:r>
-            <a:endParaRPr lang="en-IN" b="1" dirty="0"/>
           </a:p>
         </p:txBody>
       </p:sp>
